--- a/20260826_LINE料金改定に伴う運用最適化・特別プランのご案内.pptx
+++ b/20260826_LINE料金改定に伴う運用最適化・特別プランのご案内.pptx
@@ -3040,7 +3040,7 @@
                 <a:ea typeface="メイリオ"/>
                 <a:cs typeface="メイリオ"/>
               </a:rPr>
-              <a:t>LINE料金改定に伴う運用最適化・特別プランのご案内</a:t>
+              <a:t>LINE公式アカウント 料金改定に伴う運用最適化・特別プランのご案内</a:t>
             </a:r>
           </a:p>
         </p:txBody>
@@ -3077,7 +3077,7 @@
                 <a:ea typeface="メイリオ"/>
                 <a:cs typeface="メイリオ"/>
               </a:rPr>
-              <a:t>10月の料金改定により、従来の一斉配信のままでは配信コストが増大します。</a:t>
+              <a:t>2026年10月の料金改定により、従来の配信スタイルのままでは配信コストが増大します。</a:t>
             </a:r>
           </a:p>
           <a:p>
@@ -3126,7 +3126,7 @@
         </p:nvSpPr>
         <p:spPr>
           <a:xfrm>
-            <a:off x="457200" y="1517904"/>
+            <a:off x="457200" y="1444752"/>
             <a:ext cx="5486400" cy="237744"/>
           </a:xfrm>
           <a:prstGeom prst="rect">
@@ -3161,7 +3161,7 @@
                 <a:ea typeface="メイリオ"/>
                 <a:cs typeface="メイリオ"/>
               </a:rPr>
-              <a:t>課題とリスク（10月〜）</a:t>
+              <a:t>背景と課題（10月〜）</a:t>
             </a:r>
           </a:p>
         </p:txBody>
@@ -3174,8 +3174,8 @@
         </p:nvSpPr>
         <p:spPr>
           <a:xfrm>
-            <a:off x="457200" y="1773936"/>
-            <a:ext cx="8988552" cy="694944"/>
+            <a:off x="457200" y="1664208"/>
+            <a:ext cx="8988552" cy="768096"/>
           </a:xfrm>
           <a:prstGeom prst="rect">
             <a:avLst/>
@@ -3214,55 +3214,70 @@
       </p:sp>
       <p:sp>
         <p:nvSpPr>
-          <p:cNvPr id="10" name="Rectangle 9"/>
-          <p:cNvSpPr/>
+          <p:cNvPr id="10" name="TextBox 9"/>
+          <p:cNvSpPr txBox="1"/>
           <p:nvPr/>
         </p:nvSpPr>
         <p:spPr>
           <a:xfrm>
-            <a:off x="731520" y="1938528"/>
-            <a:ext cx="1234440" cy="365760"/>
+            <a:off x="731520" y="1755648"/>
+            <a:ext cx="8439912" cy="292608"/>
           </a:xfrm>
           <a:prstGeom prst="rect">
             <a:avLst/>
           </a:prstGeom>
-          <a:solidFill>
-            <a:srgbClr val="C00000"/>
-          </a:solidFill>
-          <a:ln>
-            <a:noFill/>
-          </a:ln>
-          <a:effectLst/>
+          <a:noFill/>
         </p:spPr>
-        <p:style>
-          <a:lnRef idx="1">
-            <a:schemeClr val="accent1"/>
-          </a:lnRef>
-          <a:fillRef idx="3">
-            <a:schemeClr val="accent1"/>
-          </a:fillRef>
-          <a:effectRef idx="2">
-            <a:schemeClr val="accent1"/>
-          </a:effectRef>
-          <a:fontRef idx="minor">
-            <a:schemeClr val="lt1"/>
-          </a:fontRef>
-        </p:style>
         <p:txBody>
-          <a:bodyPr rtlCol="0" anchor="ctr" wrap="square" lIns="0" rIns="0" tIns="0" bIns="0"/>
+          <a:bodyPr wrap="square" lIns="0" rIns="0" tIns="27432" bIns="27432" anchor="ctr">
+            <a:spAutoFit/>
+          </a:bodyPr>
           <a:lstStyle/>
           <a:p>
-            <a:pPr algn="ctr"/>
-            <a:r>
-              <a:rPr sz="1300" b="1">
-                <a:solidFill>
-                  <a:srgbClr val="FFFFFF"/>
+            <a:pPr algn="l"/>
+            <a:r>
+              <a:rPr sz="1100" b="1">
+                <a:solidFill>
+                  <a:srgbClr val="1F285A"/>
                 </a:solidFill>
                 <a:latin typeface="メイリオ"/>
                 <a:ea typeface="メイリオ"/>
                 <a:cs typeface="メイリオ"/>
               </a:rPr>
-              <a:t>10月〜</a:t>
+              <a:t>■ </a:t>
+            </a:r>
+            <a:r>
+              <a:rPr sz="1200" b="1">
+                <a:solidFill>
+                  <a:srgbClr val="1F285A"/>
+                </a:solidFill>
+                <a:latin typeface="メイリオ"/>
+                <a:ea typeface="メイリオ"/>
+                <a:cs typeface="メイリオ"/>
+              </a:rPr>
+              <a:t>LINEヤフーの料金体系改定</a:t>
+            </a:r>
+            <a:r>
+              <a:rPr sz="1200" b="1">
+                <a:solidFill>
+                  <a:srgbClr val="1F285A"/>
+                </a:solidFill>
+                <a:latin typeface="メイリオ"/>
+                <a:ea typeface="メイリオ"/>
+                <a:cs typeface="メイリオ"/>
+              </a:rPr>
+              <a:t>：</a:t>
+            </a:r>
+            <a:r>
+              <a:rPr sz="1200">
+                <a:solidFill>
+                  <a:srgbClr val="333333"/>
+                </a:solidFill>
+                <a:latin typeface="メイリオ"/>
+                <a:ea typeface="メイリオ"/>
+                <a:cs typeface="メイリオ"/>
+              </a:rPr>
+              <a:t>2026年10月より追加メッセージ単価体系が改定。</a:t>
             </a:r>
           </a:p>
         </p:txBody>
@@ -3275,8 +3290,8 @@
         </p:nvSpPr>
         <p:spPr>
           <a:xfrm>
-            <a:off x="2240280" y="1773936"/>
-            <a:ext cx="6931152" cy="694944"/>
+            <a:off x="731520" y="2057400"/>
+            <a:ext cx="8439912" cy="292608"/>
           </a:xfrm>
           <a:prstGeom prst="rect">
             <a:avLst/>
@@ -3284,32 +3299,25 @@
           <a:noFill/>
         </p:spPr>
         <p:txBody>
-          <a:bodyPr wrap="square" lIns="0" rIns="54864" tIns="27432" bIns="27432" anchor="ctr">
+          <a:bodyPr wrap="square" lIns="0" rIns="0" tIns="27432" bIns="27432" anchor="ctr">
             <a:spAutoFit/>
           </a:bodyPr>
           <a:lstStyle/>
           <a:p>
-            <a:pPr algn="l">
-              <a:spcAft>
-                <a:spcPts val="300"/>
-              </a:spcAft>
-            </a:pPr>
-            <a:r>
-              <a:rPr sz="1300">
-                <a:solidFill>
-                  <a:srgbClr val="333333"/>
+            <a:pPr algn="l"/>
+            <a:r>
+              <a:rPr sz="1100" b="1">
+                <a:solidFill>
+                  <a:srgbClr val="C00000"/>
                 </a:solidFill>
                 <a:latin typeface="メイリオ"/>
                 <a:ea typeface="メイリオ"/>
                 <a:cs typeface="メイリオ"/>
               </a:rPr>
-              <a:t>LINEヤフー社の追加メッセージ単価が改定されます。</a:t>
-            </a:r>
-          </a:p>
-          <a:p>
-            <a:pPr algn="l"/>
-            <a:r>
-              <a:rPr sz="1300" b="1">
+              <a:t>■ </a:t>
+            </a:r>
+            <a:r>
+              <a:rPr sz="1200" b="1">
                 <a:solidFill>
                   <a:srgbClr val="C00000"/>
                 </a:solidFill>
@@ -3317,7 +3325,29 @@
                 <a:ea typeface="メイリオ"/>
                 <a:cs typeface="メイリオ"/>
               </a:rPr>
-              <a:t>従来の一斉配信のままでは、配信コストが増大するリスクがあります。</a:t>
+              <a:t>生じるリスク</a:t>
+            </a:r>
+            <a:r>
+              <a:rPr sz="1200" b="1">
+                <a:solidFill>
+                  <a:srgbClr val="C00000"/>
+                </a:solidFill>
+                <a:latin typeface="メイリオ"/>
+                <a:ea typeface="メイリオ"/>
+                <a:cs typeface="メイリオ"/>
+              </a:rPr>
+              <a:t>：</a:t>
+            </a:r>
+            <a:r>
+              <a:rPr sz="1200">
+                <a:solidFill>
+                  <a:srgbClr val="333333"/>
+                </a:solidFill>
+                <a:latin typeface="メイリオ"/>
+                <a:ea typeface="メイリオ"/>
+                <a:cs typeface="メイリオ"/>
+              </a:rPr>
+              <a:t>従来の配信スタイルのまま運用を継続した場合、メッセージ配信コストが大幅に増大する可能性。</a:t>
             </a:r>
           </a:p>
         </p:txBody>
@@ -3330,7 +3360,7 @@
         </p:nvSpPr>
         <p:spPr>
           <a:xfrm>
-            <a:off x="457200" y="2633472"/>
+            <a:off x="457200" y="2560320"/>
             <a:ext cx="5486400" cy="237744"/>
           </a:xfrm>
           <a:prstGeom prst="rect">
@@ -3365,7 +3395,7 @@
                 <a:ea typeface="メイリオ"/>
                 <a:cs typeface="メイリオ"/>
               </a:rPr>
-              <a:t>弊社の対策提案</a:t>
+              <a:t>弊社の対応方針</a:t>
             </a:r>
           </a:p>
         </p:txBody>
@@ -3378,8 +3408,8 @@
         </p:nvSpPr>
         <p:spPr>
           <a:xfrm>
-            <a:off x="457200" y="2889504"/>
-            <a:ext cx="4357116" cy="1078992"/>
+            <a:off x="457200" y="2779776"/>
+            <a:ext cx="4357116" cy="1188720"/>
           </a:xfrm>
           <a:prstGeom prst="rect">
             <a:avLst/>
@@ -3424,7 +3454,7 @@
         </p:nvSpPr>
         <p:spPr>
           <a:xfrm>
-            <a:off x="658368" y="3072384"/>
+            <a:off x="658368" y="2944368"/>
             <a:ext cx="384048" cy="384048"/>
           </a:xfrm>
           <a:prstGeom prst="rect">
@@ -3479,7 +3509,7 @@
         </p:nvSpPr>
         <p:spPr>
           <a:xfrm>
-            <a:off x="1152144" y="3054096"/>
+            <a:off x="1152144" y="2926080"/>
             <a:ext cx="3461003" cy="420624"/>
           </a:xfrm>
           <a:prstGeom prst="rect">
@@ -3503,7 +3533,7 @@
                 <a:ea typeface="メイリオ"/>
                 <a:cs typeface="メイリオ"/>
               </a:rPr>
-              <a:t>一斉配信 → セグメント配信へ</a:t>
+              <a:t>配信の最適化</a:t>
             </a:r>
           </a:p>
         </p:txBody>
@@ -3516,8 +3546,8 @@
         </p:nvSpPr>
         <p:spPr>
           <a:xfrm>
-            <a:off x="1152144" y="3493008"/>
-            <a:ext cx="3461003" cy="420624"/>
+            <a:off x="1152144" y="3383280"/>
+            <a:ext cx="3461003" cy="475488"/>
           </a:xfrm>
           <a:prstGeom prst="rect">
             <a:avLst/>
@@ -3544,7 +3574,7 @@
                 <a:ea typeface="メイリオ"/>
                 <a:cs typeface="メイリオ"/>
               </a:rPr>
-              <a:t>配信対象を絞り込み、効果の低い配信をなくすことで、不要なコストを削減します。</a:t>
+              <a:t>一斉配信から「セグメント配信」へ移行し、不要コストを圧縮します。</a:t>
             </a:r>
           </a:p>
         </p:txBody>
@@ -3557,8 +3587,8 @@
         </p:nvSpPr>
         <p:spPr>
           <a:xfrm>
-            <a:off x="5088636" y="2889504"/>
-            <a:ext cx="4357116" cy="1078992"/>
+            <a:off x="5088636" y="2779776"/>
+            <a:ext cx="4357116" cy="1188720"/>
           </a:xfrm>
           <a:prstGeom prst="rect">
             <a:avLst/>
@@ -3603,7 +3633,7 @@
         </p:nvSpPr>
         <p:spPr>
           <a:xfrm>
-            <a:off x="5289803" y="3072384"/>
+            <a:off x="5289803" y="2944368"/>
             <a:ext cx="384048" cy="384048"/>
           </a:xfrm>
           <a:prstGeom prst="rect">
@@ -3658,7 +3688,7 @@
         </p:nvSpPr>
         <p:spPr>
           <a:xfrm>
-            <a:off x="5783579" y="3054096"/>
+            <a:off x="5783579" y="2926080"/>
             <a:ext cx="3461003" cy="420624"/>
           </a:xfrm>
           <a:prstGeom prst="rect">
@@ -3682,7 +3712,7 @@
                 <a:ea typeface="メイリオ"/>
                 <a:cs typeface="メイリオ"/>
               </a:rPr>
-              <a:t>弊社特別調整プランの設計</a:t>
+              <a:t>特別プランの再設計</a:t>
             </a:r>
           </a:p>
         </p:txBody>
@@ -3695,8 +3725,8 @@
         </p:nvSpPr>
         <p:spPr>
           <a:xfrm>
-            <a:off x="5783579" y="3493008"/>
-            <a:ext cx="3461003" cy="420624"/>
+            <a:off x="5783579" y="3383280"/>
+            <a:ext cx="3461003" cy="475488"/>
           </a:xfrm>
           <a:prstGeom prst="rect">
             <a:avLst/>
@@ -3723,7 +3753,7 @@
                 <a:ea typeface="メイリオ"/>
                 <a:cs typeface="メイリオ"/>
               </a:rPr>
-              <a:t>各社様の配信規模に応じた調整プランを設計し、実質単価を最適化します。</a:t>
+              <a:t>新料金下でも費用対効果を最大化できるよう、弊社独自の「調整プラン（特別還元）」をご提供します。</a:t>
             </a:r>
           </a:p>
         </p:txBody>
@@ -3736,7 +3766,7 @@
         </p:nvSpPr>
         <p:spPr>
           <a:xfrm>
-            <a:off x="457200" y="4151376"/>
+            <a:off x="457200" y="4096512"/>
             <a:ext cx="5486400" cy="237744"/>
           </a:xfrm>
           <a:prstGeom prst="rect">
@@ -3771,7 +3801,7 @@
                 <a:ea typeface="メイリオ"/>
                 <a:cs typeface="メイリオ"/>
               </a:rPr>
-              <a:t>スケジュールと適用の流れ（11月開始の理由）</a:t>
+              <a:t>スケジュール（なぜ11月からの適用なのか）</a:t>
             </a:r>
           </a:p>
         </p:txBody>
@@ -3784,8 +3814,8 @@
         </p:nvSpPr>
         <p:spPr>
           <a:xfrm>
-            <a:off x="457200" y="4407408"/>
-            <a:ext cx="2813304" cy="1773936"/>
+            <a:off x="457200" y="4315968"/>
+            <a:ext cx="2813304" cy="1901952"/>
           </a:xfrm>
           <a:prstGeom prst="rect">
             <a:avLst/>
@@ -3830,7 +3860,7 @@
         </p:nvSpPr>
         <p:spPr>
           <a:xfrm>
-            <a:off x="548640" y="4535424"/>
+            <a:off x="548640" y="4443983"/>
             <a:ext cx="2630424" cy="384048"/>
           </a:xfrm>
           <a:prstGeom prst="rect">
@@ -3885,7 +3915,7 @@
         </p:nvSpPr>
         <p:spPr>
           <a:xfrm>
-            <a:off x="566928" y="4974336"/>
+            <a:off x="566928" y="4882896"/>
             <a:ext cx="2593848" cy="310896"/>
           </a:xfrm>
           <a:prstGeom prst="rect">
@@ -3909,7 +3939,7 @@
                 <a:ea typeface="メイリオ"/>
                 <a:cs typeface="メイリオ"/>
               </a:rPr>
-              <a:t>実データ計測・検証期</a:t>
+              <a:t>配信データ計測・検証期</a:t>
             </a:r>
           </a:p>
         </p:txBody>
@@ -3922,8 +3952,8 @@
         </p:nvSpPr>
         <p:spPr>
           <a:xfrm>
-            <a:off x="585216" y="5321808"/>
-            <a:ext cx="2557272" cy="548640"/>
+            <a:off x="585216" y="5230368"/>
+            <a:ext cx="2557272" cy="603504"/>
           </a:xfrm>
           <a:prstGeom prst="rect">
             <a:avLst/>
@@ -3950,7 +3980,7 @@
                 <a:ea typeface="メイリオ"/>
                 <a:cs typeface="メイリオ"/>
               </a:rPr>
-              <a:t>新料金下での実際の配信ボリュームと費用対効果を正確に計測します。</a:t>
+              <a:t>新料金下での実際の配信ボリュームとコストの適正推移を測定・分析します。</a:t>
             </a:r>
           </a:p>
         </p:txBody>
@@ -3987,7 +4017,7 @@
                 <a:ea typeface="メイリオ"/>
                 <a:cs typeface="メイリオ"/>
               </a:rPr>
-              <a:t>※ 原則、通常プランの適用となります</a:t>
+              <a:t>※ 原則、通常プラン適用</a:t>
             </a:r>
           </a:p>
         </p:txBody>
@@ -4000,7 +4030,7 @@
         </p:nvSpPr>
         <p:spPr>
           <a:xfrm>
-            <a:off x="3307080" y="5157216"/>
+            <a:off x="3307080" y="5129783"/>
             <a:ext cx="201168" cy="274320"/>
           </a:xfrm>
           <a:prstGeom prst="rightArrow">
@@ -4044,8 +4074,8 @@
         </p:nvSpPr>
         <p:spPr>
           <a:xfrm>
-            <a:off x="3544824" y="4407408"/>
-            <a:ext cx="2813304" cy="1773936"/>
+            <a:off x="3544824" y="4315968"/>
+            <a:ext cx="2813304" cy="1901952"/>
           </a:xfrm>
           <a:prstGeom prst="rect">
             <a:avLst/>
@@ -4090,7 +4120,7 @@
         </p:nvSpPr>
         <p:spPr>
           <a:xfrm>
-            <a:off x="3636264" y="4535424"/>
+            <a:off x="3636264" y="4443983"/>
             <a:ext cx="2630424" cy="384048"/>
           </a:xfrm>
           <a:prstGeom prst="rect">
@@ -4145,7 +4175,7 @@
         </p:nvSpPr>
         <p:spPr>
           <a:xfrm>
-            <a:off x="3654552" y="4974336"/>
+            <a:off x="3654552" y="4882896"/>
             <a:ext cx="2593848" cy="310896"/>
           </a:xfrm>
           <a:prstGeom prst="rect">
@@ -4169,7 +4199,7 @@
                 <a:ea typeface="メイリオ"/>
                 <a:cs typeface="メイリオ"/>
               </a:rPr>
-              <a:t>個別シミュレーション</a:t>
+              <a:t>個別シミュレーション提示</a:t>
             </a:r>
           </a:p>
         </p:txBody>
@@ -4182,8 +4212,8 @@
         </p:nvSpPr>
         <p:spPr>
           <a:xfrm>
-            <a:off x="3672840" y="5321808"/>
-            <a:ext cx="2557272" cy="548640"/>
+            <a:off x="3672840" y="5230368"/>
+            <a:ext cx="2557272" cy="603504"/>
           </a:xfrm>
           <a:prstGeom prst="rect">
             <a:avLst/>
@@ -4210,57 +4240,20 @@
                 <a:ea typeface="メイリオ"/>
                 <a:cs typeface="メイリオ"/>
               </a:rPr>
-              <a:t>10月実績をもとに媒体インセンティブを算出し、還元率を試算します。</a:t>
+              <a:t>10月の配信実績および媒体インセンティブを試算し、貴社に最もメリットが出る特別プランを個別に作成します。</a:t>
             </a:r>
           </a:p>
         </p:txBody>
       </p:sp>
       <p:sp>
         <p:nvSpPr>
-          <p:cNvPr id="32" name="TextBox 31"/>
-          <p:cNvSpPr txBox="1"/>
-          <p:nvPr/>
-        </p:nvSpPr>
-        <p:spPr>
-          <a:xfrm>
-            <a:off x="3672840" y="5870448"/>
-            <a:ext cx="2557272" cy="256032"/>
-          </a:xfrm>
-          <a:prstGeom prst="rect">
-            <a:avLst/>
-          </a:prstGeom>
-          <a:noFill/>
-        </p:spPr>
-        <p:txBody>
-          <a:bodyPr wrap="square" lIns="0" rIns="0" tIns="27432" bIns="27432" anchor="ctr">
-            <a:spAutoFit/>
-          </a:bodyPr>
-          <a:lstStyle/>
-          <a:p>
-            <a:pPr algn="l"/>
-            <a:r>
-              <a:rPr sz="950">
-                <a:solidFill>
-                  <a:srgbClr val="1565C0"/>
-                </a:solidFill>
-                <a:latin typeface="メイリオ"/>
-                <a:ea typeface="メイリオ"/>
-                <a:cs typeface="メイリオ"/>
-              </a:rPr>
-              <a:t>※ 各社様ごとに個別で試算します</a:t>
-            </a:r>
-          </a:p>
-        </p:txBody>
-      </p:sp>
-      <p:sp>
-        <p:nvSpPr>
-          <p:cNvPr id="33" name="Right Arrow 32"/>
+          <p:cNvPr id="32" name="Right Arrow 31"/>
           <p:cNvSpPr/>
           <p:nvPr/>
         </p:nvSpPr>
         <p:spPr>
           <a:xfrm>
-            <a:off x="6394704" y="5157216"/>
+            <a:off x="6394704" y="5129783"/>
             <a:ext cx="201168" cy="274320"/>
           </a:xfrm>
           <a:prstGeom prst="rightArrow">
@@ -4271,6 +4264,52 @@
           </a:solidFill>
           <a:ln>
             <a:noFill/>
+          </a:ln>
+          <a:effectLst/>
+        </p:spPr>
+        <p:style>
+          <a:lnRef idx="1">
+            <a:schemeClr val="accent1"/>
+          </a:lnRef>
+          <a:fillRef idx="3">
+            <a:schemeClr val="accent1"/>
+          </a:fillRef>
+          <a:effectRef idx="2">
+            <a:schemeClr val="accent1"/>
+          </a:effectRef>
+          <a:fontRef idx="minor">
+            <a:schemeClr val="lt1"/>
+          </a:fontRef>
+        </p:style>
+        <p:txBody>
+          <a:bodyPr rtlCol="0" anchor="ctr" wrap="square"/>
+          <a:lstStyle/>
+          <a:p>
+            <a:pPr algn="ctr"/>
+          </a:p>
+        </p:txBody>
+      </p:sp>
+      <p:sp>
+        <p:nvSpPr>
+          <p:cNvPr id="33" name="Rectangle 32"/>
+          <p:cNvSpPr/>
+          <p:nvPr/>
+        </p:nvSpPr>
+        <p:spPr>
+          <a:xfrm>
+            <a:off x="6632448" y="4315968"/>
+            <a:ext cx="2813304" cy="1901952"/>
+          </a:xfrm>
+          <a:prstGeom prst="rect">
+            <a:avLst/>
+          </a:prstGeom>
+          <a:solidFill>
+            <a:srgbClr val="1F285A"/>
+          </a:solidFill>
+          <a:ln w="19050">
+            <a:solidFill>
+              <a:srgbClr val="1F285A"/>
+            </a:solidFill>
           </a:ln>
           <a:effectLst/>
         </p:spPr>
@@ -4304,53 +4343,7 @@
         </p:nvSpPr>
         <p:spPr>
           <a:xfrm>
-            <a:off x="6632448" y="4407408"/>
-            <a:ext cx="2813304" cy="1773936"/>
-          </a:xfrm>
-          <a:prstGeom prst="rect">
-            <a:avLst/>
-          </a:prstGeom>
-          <a:solidFill>
-            <a:srgbClr val="1F285A"/>
-          </a:solidFill>
-          <a:ln w="19050">
-            <a:solidFill>
-              <a:srgbClr val="1F285A"/>
-            </a:solidFill>
-          </a:ln>
-          <a:effectLst/>
-        </p:spPr>
-        <p:style>
-          <a:lnRef idx="1">
-            <a:schemeClr val="accent1"/>
-          </a:lnRef>
-          <a:fillRef idx="3">
-            <a:schemeClr val="accent1"/>
-          </a:fillRef>
-          <a:effectRef idx="2">
-            <a:schemeClr val="accent1"/>
-          </a:effectRef>
-          <a:fontRef idx="minor">
-            <a:schemeClr val="lt1"/>
-          </a:fontRef>
-        </p:style>
-        <p:txBody>
-          <a:bodyPr rtlCol="0" anchor="ctr" wrap="square"/>
-          <a:lstStyle/>
-          <a:p>
-            <a:pPr algn="ctr"/>
-          </a:p>
-        </p:txBody>
-      </p:sp>
-      <p:sp>
-        <p:nvSpPr>
-          <p:cNvPr id="35" name="Rectangle 34"/>
-          <p:cNvSpPr/>
-          <p:nvPr/>
-        </p:nvSpPr>
-        <p:spPr>
-          <a:xfrm>
-            <a:off x="6723887" y="4535424"/>
+            <a:off x="6723887" y="4443983"/>
             <a:ext cx="2630424" cy="384048"/>
           </a:xfrm>
           <a:prstGeom prst="rect">
@@ -4399,13 +4392,13 @@
       </p:sp>
       <p:sp>
         <p:nvSpPr>
-          <p:cNvPr id="36" name="TextBox 35"/>
+          <p:cNvPr id="35" name="TextBox 34"/>
           <p:cNvSpPr txBox="1"/>
           <p:nvPr/>
         </p:nvSpPr>
         <p:spPr>
           <a:xfrm>
-            <a:off x="6742176" y="4974336"/>
+            <a:off x="6742176" y="4882896"/>
             <a:ext cx="2593848" cy="310896"/>
           </a:xfrm>
           <a:prstGeom prst="rect">
@@ -4436,14 +4429,14 @@
       </p:sp>
       <p:sp>
         <p:nvSpPr>
-          <p:cNvPr id="37" name="TextBox 36"/>
+          <p:cNvPr id="36" name="TextBox 35"/>
           <p:cNvSpPr txBox="1"/>
           <p:nvPr/>
         </p:nvSpPr>
         <p:spPr>
           <a:xfrm>
-            <a:off x="6760463" y="5321808"/>
-            <a:ext cx="2557272" cy="548640"/>
+            <a:off x="6760463" y="5230368"/>
+            <a:ext cx="2557272" cy="603504"/>
           </a:xfrm>
           <a:prstGeom prst="rect">
             <a:avLst/>
@@ -4470,44 +4463,7 @@
                 <a:ea typeface="メイリオ"/>
                 <a:cs typeface="メイリオ"/>
               </a:rPr>
-              <a:t>各社様に最適化した特別プランの適用を開始します。</a:t>
-            </a:r>
-          </a:p>
-        </p:txBody>
-      </p:sp>
-      <p:sp>
-        <p:nvSpPr>
-          <p:cNvPr id="38" name="TextBox 37"/>
-          <p:cNvSpPr txBox="1"/>
-          <p:nvPr/>
-        </p:nvSpPr>
-        <p:spPr>
-          <a:xfrm>
-            <a:off x="6760463" y="5870448"/>
-            <a:ext cx="2557272" cy="256032"/>
-          </a:xfrm>
-          <a:prstGeom prst="rect">
-            <a:avLst/>
-          </a:prstGeom>
-          <a:noFill/>
-        </p:spPr>
-        <p:txBody>
-          <a:bodyPr wrap="square" lIns="0" rIns="0" tIns="27432" bIns="27432" anchor="ctr">
-            <a:spAutoFit/>
-          </a:bodyPr>
-          <a:lstStyle/>
-          <a:p>
-            <a:pPr algn="l"/>
-            <a:r>
-              <a:rPr sz="950">
-                <a:solidFill>
-                  <a:srgbClr val="C8D0E8"/>
-                </a:solidFill>
-                <a:latin typeface="メイリオ"/>
-                <a:ea typeface="メイリオ"/>
-                <a:cs typeface="メイリオ"/>
-              </a:rPr>
-              <a:t>※ 配信規模に応じて個別に適用します</a:t>
+              <a:t>各社様に最適化した特別プランを正式に適用します。</a:t>
             </a:r>
           </a:p>
         </p:txBody>

--- a/20260826_LINE料金改定に伴う運用最適化・特別プランのご案内.pptx
+++ b/20260826_LINE料金改定に伴う運用最適化・特別プランのご案内.pptx
@@ -676,34 +676,50 @@
           <a:lstStyle/>
           <a:p>
             <a:r>
-              <a:t>【営業トークスクリプト】LINE料金改定に伴う運用最適化・特別プランのご案内</a:t>
+              <a:t>【営業トークスクリプト】LINE公式アカウント 料金改定に伴う運用最適化・特別プランのご案内</a:t>
             </a:r>
           </a:p>
           <a:p/>
           <a:p>
             <a:r>
+              <a:t>■ ひとことで言うと</a:t>
+            </a:r>
+          </a:p>
+          <a:p>
+            <a:r>
+              <a:t>10月は新料金での実データを取る期間です。</a:t>
+            </a:r>
+          </a:p>
+          <a:p>
+            <a:r>
+              <a:t>その実績をもとに、11月から貴社に合わせた特別プランを適用します。</a:t>
+            </a:r>
+          </a:p>
+          <a:p/>
+          <a:p>
+            <a:r>
               <a:t>■ 導入</a:t>
             </a:r>
           </a:p>
           <a:p>
             <a:r>
-              <a:t>2026年10月から、LINEヤフー社の料金体系が改定されます。追加メッセージの単価が変わり、</a:t>
-            </a:r>
-          </a:p>
-          <a:p>
-            <a:r>
-              <a:t>大量配信に対する割引が縮小します。御社のように配信ボリュームが大きいアカウントほど、</a:t>
-            </a:r>
-          </a:p>
-          <a:p>
-            <a:r>
-              <a:t>影響を受けやすい改定です。</a:t>
+              <a:t>2026年10月から、LINEヤフー社の料金体系が改定されます。</a:t>
+            </a:r>
+          </a:p>
+          <a:p>
+            <a:r>
+              <a:t>追加メッセージの単価が変わり、大量配信に対する割引が縮小します。</a:t>
+            </a:r>
+          </a:p>
+          <a:p>
+            <a:r>
+              <a:t>貴社のように配信ボリュームが大きいアカウントほど、影響を受けやすい改定です。</a:t>
             </a:r>
           </a:p>
           <a:p/>
           <a:p>
             <a:r>
-              <a:t>■ 課題とリスク</a:t>
+              <a:t>■ 課題</a:t>
             </a:r>
           </a:p>
           <a:p>
@@ -724,17 +740,12 @@
           <a:p/>
           <a:p>
             <a:r>
-              <a:t>■ 弊社の対策</a:t>
-            </a:r>
-          </a:p>
-          <a:p>
-            <a:r>
-              <a:t>ご提案は2つです。</a:t>
-            </a:r>
-          </a:p>
-          <a:p>
-            <a:r>
-              <a:t>ひとつめは、一斉配信からセグメント配信への切り替えです。</a:t>
+              <a:t>■ ご提案</a:t>
+            </a:r>
+          </a:p>
+          <a:p>
+            <a:r>
+              <a:t>一斉配信からセグメント配信への切り替えです。</a:t>
             </a:r>
           </a:p>
           <a:p>
@@ -744,7 +755,7 @@
           </a:p>
           <a:p>
             <a:r>
-              <a:t>ふたつめが、御社の配信規模に合わせた弊社の特別調整プランです。</a:t>
+              <a:t>あわせて、貴社の配信規模に合わせた弊社の特別プランをご用意します。</a:t>
             </a:r>
           </a:p>
           <a:p/>
@@ -755,12 +766,7 @@
           </a:p>
           <a:p>
             <a:r>
-              <a:t>特別プランの適用は11月からとさせてください。理由は、10月が</a:t>
-            </a:r>
-          </a:p>
-          <a:p>
-            <a:r>
-              <a:t>「新しい料金体系での実データを取る期間」だからです。</a:t>
+              <a:t>特別プランの適用は11月からとさせてください。</a:t>
             </a:r>
           </a:p>
           <a:p>
@@ -775,17 +781,7 @@
           </a:p>
           <a:p>
             <a:r>
-              <a:t>そのうえで10月下旬に、実績をもとに媒体インセンティブを算出し、</a:t>
-            </a:r>
-          </a:p>
-          <a:p>
-            <a:r>
-              <a:t>御社にどれだけ還元できるかを試算します。</a:t>
-            </a:r>
-          </a:p>
-          <a:p>
-            <a:r>
-              <a:t>その試算に基づいて、11月から御社専用の特別プランを適用します。</a:t>
+              <a:t>その実績と媒体インセンティブを踏まえて、11月から貴社専用の特別プランを適用します。</a:t>
             </a:r>
           </a:p>
           <a:p/>
@@ -801,17 +797,7 @@
           </a:p>
           <a:p>
             <a:r>
-              <a:t>御社にとって一番効果の大きい形で11月から適用する、という進め方です。</a:t>
-            </a:r>
-          </a:p>
-          <a:p>
-            <a:r>
-              <a:t>根拠のない一律値引きよりも、実データに基づいた最適化のほうが、</a:t>
-            </a:r>
-          </a:p>
-          <a:p>
-            <a:r>
-              <a:t>結果的に御社のメリットは大きくなります。</a:t>
+              <a:t>貴社にとって一番効果の大きい形で11月から適用する、という進め方です。</a:t>
             </a:r>
           </a:p>
           <a:p/>
@@ -848,7 +834,7 @@
           </a:p>
           <a:p>
             <a:r>
-              <a:t>   10月下旬に、御社専用のシミュレーションをお出しします。</a:t>
+              <a:t>   10月下旬に、貴社専用のシミュレーションをお出しします。</a:t>
             </a:r>
           </a:p>
           <a:p/>
@@ -3069,7 +3055,7 @@
           <a:p>
             <a:pPr algn="ctr"/>
             <a:r>
-              <a:rPr sz="1350" b="1">
+              <a:rPr sz="1500" b="1">
                 <a:solidFill>
                   <a:srgbClr val="333333"/>
                 </a:solidFill>
@@ -3077,13 +3063,13 @@
                 <a:ea typeface="メイリオ"/>
                 <a:cs typeface="メイリオ"/>
               </a:rPr>
-              <a:t>2026年10月の料金改定により、従来の配信スタイルのままでは配信コストが増大します。</a:t>
+              <a:t>配信の見直しと特別プランで、料金改定によるコスト増を抑えます。</a:t>
             </a:r>
           </a:p>
           <a:p>
             <a:pPr algn="ctr"/>
             <a:r>
-              <a:rPr sz="1350" b="1">
+              <a:rPr sz="1500" b="1">
                 <a:solidFill>
                   <a:srgbClr val="333333"/>
                 </a:solidFill>
@@ -3091,10 +3077,10 @@
                 <a:ea typeface="メイリオ"/>
                 <a:cs typeface="メイリオ"/>
               </a:rPr>
-              <a:t>10月に実データを計測のうえ、</a:t>
-            </a:r>
-            <a:r>
-              <a:rPr sz="1350" b="1">
+              <a:t>適用開始は</a:t>
+            </a:r>
+            <a:r>
+              <a:rPr sz="1500" b="1">
                 <a:solidFill>
                   <a:srgbClr val="C00000"/>
                 </a:solidFill>
@@ -3105,7 +3091,7 @@
               <a:t>11月から</a:t>
             </a:r>
             <a:r>
-              <a:rPr sz="1350" b="1">
+              <a:rPr sz="1500" b="1">
                 <a:solidFill>
                   <a:srgbClr val="333333"/>
                 </a:solidFill>
@@ -3113,69 +3099,21 @@
                 <a:ea typeface="メイリオ"/>
                 <a:cs typeface="メイリオ"/>
               </a:rPr>
-              <a:t>各社様に最適化した特別プランを適用いたします。</a:t>
+              <a:t>。10月は新料金での実データを計測する期間です。</a:t>
             </a:r>
           </a:p>
         </p:txBody>
       </p:sp>
       <p:sp>
         <p:nvSpPr>
-          <p:cNvPr id="8" name="TextBox 7"/>
-          <p:cNvSpPr txBox="1"/>
-          <p:nvPr/>
-        </p:nvSpPr>
-        <p:spPr>
-          <a:xfrm>
-            <a:off x="457200" y="1444752"/>
-            <a:ext cx="5486400" cy="237744"/>
-          </a:xfrm>
-          <a:prstGeom prst="rect">
-            <a:avLst/>
-          </a:prstGeom>
-          <a:noFill/>
-        </p:spPr>
-        <p:txBody>
-          <a:bodyPr wrap="square" lIns="0" rIns="0" tIns="27432" bIns="27432" anchor="ctr">
-            <a:spAutoFit/>
-          </a:bodyPr>
-          <a:lstStyle/>
-          <a:p>
-            <a:pPr algn="l"/>
-            <a:r>
-              <a:rPr sz="1200" b="1">
-                <a:solidFill>
-                  <a:srgbClr val="C00000"/>
-                </a:solidFill>
-                <a:latin typeface="メイリオ"/>
-                <a:ea typeface="メイリオ"/>
-                <a:cs typeface="メイリオ"/>
-              </a:rPr>
-              <a:t>①  </a:t>
-            </a:r>
-            <a:r>
-              <a:rPr sz="1200" b="1">
-                <a:solidFill>
-                  <a:srgbClr val="C00000"/>
-                </a:solidFill>
-                <a:latin typeface="メイリオ"/>
-                <a:ea typeface="メイリオ"/>
-                <a:cs typeface="メイリオ"/>
-              </a:rPr>
-              <a:t>背景と課題（10月〜）</a:t>
-            </a:r>
-          </a:p>
-        </p:txBody>
-      </p:sp>
-      <p:sp>
-        <p:nvSpPr>
-          <p:cNvPr id="9" name="Rectangle 8"/>
+          <p:cNvPr id="8" name="Rectangle 7"/>
           <p:cNvSpPr/>
           <p:nvPr/>
         </p:nvSpPr>
         <p:spPr>
           <a:xfrm>
-            <a:off x="457200" y="1664208"/>
-            <a:ext cx="8988552" cy="768096"/>
+            <a:off x="457200" y="1783080"/>
+            <a:ext cx="2813304" cy="2743200"/>
           </a:xfrm>
           <a:prstGeom prst="rect">
             <a:avLst/>
@@ -3214,14 +3152,69 @@
       </p:sp>
       <p:sp>
         <p:nvSpPr>
+          <p:cNvPr id="9" name="Rectangle 8"/>
+          <p:cNvSpPr/>
+          <p:nvPr/>
+        </p:nvSpPr>
+        <p:spPr>
+          <a:xfrm>
+            <a:off x="585216" y="1947672"/>
+            <a:ext cx="2557272" cy="457200"/>
+          </a:xfrm>
+          <a:prstGeom prst="rect">
+            <a:avLst/>
+          </a:prstGeom>
+          <a:solidFill>
+            <a:srgbClr val="8C8C8C"/>
+          </a:solidFill>
+          <a:ln>
+            <a:noFill/>
+          </a:ln>
+          <a:effectLst/>
+        </p:spPr>
+        <p:style>
+          <a:lnRef idx="1">
+            <a:schemeClr val="accent1"/>
+          </a:lnRef>
+          <a:fillRef idx="3">
+            <a:schemeClr val="accent1"/>
+          </a:fillRef>
+          <a:effectRef idx="2">
+            <a:schemeClr val="accent1"/>
+          </a:effectRef>
+          <a:fontRef idx="minor">
+            <a:schemeClr val="lt1"/>
+          </a:fontRef>
+        </p:style>
+        <p:txBody>
+          <a:bodyPr rtlCol="0" anchor="ctr" wrap="square" lIns="0" rIns="0" tIns="0" bIns="0"/>
+          <a:lstStyle/>
+          <a:p>
+            <a:pPr algn="ctr"/>
+            <a:r>
+              <a:rPr sz="1400" b="1">
+                <a:solidFill>
+                  <a:srgbClr val="FFFFFF"/>
+                </a:solidFill>
+                <a:latin typeface="メイリオ"/>
+                <a:ea typeface="メイリオ"/>
+                <a:cs typeface="メイリオ"/>
+              </a:rPr>
+              <a:t>10月〜</a:t>
+            </a:r>
+          </a:p>
+        </p:txBody>
+      </p:sp>
+      <p:sp>
+        <p:nvSpPr>
           <p:cNvPr id="10" name="TextBox 9"/>
           <p:cNvSpPr txBox="1"/>
           <p:nvPr/>
         </p:nvSpPr>
         <p:spPr>
           <a:xfrm>
-            <a:off x="731520" y="1755648"/>
-            <a:ext cx="8439912" cy="292608"/>
+            <a:off x="585216" y="2569464"/>
+            <a:ext cx="2557272" cy="566928"/>
           </a:xfrm>
           <a:prstGeom prst="rect">
             <a:avLst/>
@@ -3234,50 +3227,17 @@
           </a:bodyPr>
           <a:lstStyle/>
           <a:p>
-            <a:pPr algn="l"/>
-            <a:r>
-              <a:rPr sz="1100" b="1">
-                <a:solidFill>
-                  <a:srgbClr val="1F285A"/>
+            <a:pPr algn="ctr"/>
+            <a:r>
+              <a:rPr sz="1700" b="1">
+                <a:solidFill>
+                  <a:srgbClr val="333333"/>
                 </a:solidFill>
                 <a:latin typeface="メイリオ"/>
                 <a:ea typeface="メイリオ"/>
                 <a:cs typeface="メイリオ"/>
               </a:rPr>
-              <a:t>■ </a:t>
-            </a:r>
-            <a:r>
-              <a:rPr sz="1200" b="1">
-                <a:solidFill>
-                  <a:srgbClr val="1F285A"/>
-                </a:solidFill>
-                <a:latin typeface="メイリオ"/>
-                <a:ea typeface="メイリオ"/>
-                <a:cs typeface="メイリオ"/>
-              </a:rPr>
-              <a:t>LINEヤフーの料金体系改定</a:t>
-            </a:r>
-            <a:r>
-              <a:rPr sz="1200" b="1">
-                <a:solidFill>
-                  <a:srgbClr val="1F285A"/>
-                </a:solidFill>
-                <a:latin typeface="メイリオ"/>
-                <a:ea typeface="メイリオ"/>
-                <a:cs typeface="メイリオ"/>
-              </a:rPr>
-              <a:t>：</a:t>
-            </a:r>
-            <a:r>
-              <a:rPr sz="1200">
-                <a:solidFill>
-                  <a:srgbClr val="333333"/>
-                </a:solidFill>
-                <a:latin typeface="メイリオ"/>
-                <a:ea typeface="メイリオ"/>
-                <a:cs typeface="メイリオ"/>
-              </a:rPr>
-              <a:t>2026年10月より追加メッセージ単価体系が改定。</a:t>
+              <a:t>料金体系が変わります</a:t>
             </a:r>
           </a:p>
         </p:txBody>
@@ -3290,8 +3250,8 @@
         </p:nvSpPr>
         <p:spPr>
           <a:xfrm>
-            <a:off x="731520" y="2057400"/>
-            <a:ext cx="8439912" cy="292608"/>
+            <a:off x="621792" y="3264408"/>
+            <a:ext cx="2484120" cy="1005840"/>
           </a:xfrm>
           <a:prstGeom prst="rect">
             <a:avLst/>
@@ -3299,104 +3259,71 @@
           <a:noFill/>
         </p:spPr>
         <p:txBody>
-          <a:bodyPr wrap="square" lIns="0" rIns="0" tIns="27432" bIns="27432" anchor="ctr">
+          <a:bodyPr wrap="square" lIns="0" rIns="0" tIns="27432" bIns="27432" anchor="t">
             <a:spAutoFit/>
           </a:bodyPr>
           <a:lstStyle/>
           <a:p>
-            <a:pPr algn="l"/>
-            <a:r>
-              <a:rPr sz="1100" b="1">
-                <a:solidFill>
-                  <a:srgbClr val="C00000"/>
+            <a:pPr algn="l">
+              <a:lnSpc>
+                <a:spcPct val="135000"/>
+              </a:lnSpc>
+            </a:pPr>
+            <a:r>
+              <a:rPr sz="1200">
+                <a:solidFill>
+                  <a:srgbClr val="333333"/>
                 </a:solidFill>
                 <a:latin typeface="メイリオ"/>
                 <a:ea typeface="メイリオ"/>
                 <a:cs typeface="メイリオ"/>
               </a:rPr>
-              <a:t>■ </a:t>
-            </a:r>
-            <a:r>
-              <a:rPr sz="1200" b="1">
-                <a:solidFill>
-                  <a:srgbClr val="C00000"/>
-                </a:solidFill>
-                <a:latin typeface="メイリオ"/>
-                <a:ea typeface="メイリオ"/>
-                <a:cs typeface="メイリオ"/>
-              </a:rPr>
-              <a:t>生じるリスク</a:t>
-            </a:r>
-            <a:r>
-              <a:rPr sz="1200" b="1">
-                <a:solidFill>
-                  <a:srgbClr val="C00000"/>
-                </a:solidFill>
-                <a:latin typeface="メイリオ"/>
-                <a:ea typeface="メイリオ"/>
-                <a:cs typeface="メイリオ"/>
-              </a:rPr>
-              <a:t>：</a:t>
-            </a:r>
-            <a:r>
-              <a:rPr sz="1200">
-                <a:solidFill>
-                  <a:srgbClr val="333333"/>
-                </a:solidFill>
-                <a:latin typeface="メイリオ"/>
-                <a:ea typeface="メイリオ"/>
-                <a:cs typeface="メイリオ"/>
-              </a:rPr>
-              <a:t>従来の配信スタイルのまま運用を継続した場合、メッセージ配信コストが大幅に増大する可能性。</a:t>
+              <a:t>LINEヤフー社の追加メッセージ単価が改定されます。今の配信のままでは、コストが上がります。</a:t>
             </a:r>
           </a:p>
         </p:txBody>
       </p:sp>
       <p:sp>
         <p:nvSpPr>
-          <p:cNvPr id="12" name="TextBox 11"/>
-          <p:cNvSpPr txBox="1"/>
+          <p:cNvPr id="12" name="Right Arrow 11"/>
+          <p:cNvSpPr/>
           <p:nvPr/>
         </p:nvSpPr>
         <p:spPr>
           <a:xfrm>
-            <a:off x="457200" y="2560320"/>
-            <a:ext cx="5486400" cy="237744"/>
+            <a:off x="3307080" y="3008376"/>
+            <a:ext cx="201168" cy="292608"/>
           </a:xfrm>
-          <a:prstGeom prst="rect">
+          <a:prstGeom prst="rightArrow">
             <a:avLst/>
           </a:prstGeom>
-          <a:noFill/>
+          <a:solidFill>
+            <a:srgbClr val="D9D9D9"/>
+          </a:solidFill>
+          <a:ln>
+            <a:noFill/>
+          </a:ln>
+          <a:effectLst/>
         </p:spPr>
+        <p:style>
+          <a:lnRef idx="1">
+            <a:schemeClr val="accent1"/>
+          </a:lnRef>
+          <a:fillRef idx="3">
+            <a:schemeClr val="accent1"/>
+          </a:fillRef>
+          <a:effectRef idx="2">
+            <a:schemeClr val="accent1"/>
+          </a:effectRef>
+          <a:fontRef idx="minor">
+            <a:schemeClr val="lt1"/>
+          </a:fontRef>
+        </p:style>
         <p:txBody>
-          <a:bodyPr wrap="square" lIns="0" rIns="0" tIns="27432" bIns="27432" anchor="ctr">
-            <a:spAutoFit/>
-          </a:bodyPr>
+          <a:bodyPr rtlCol="0" anchor="ctr" wrap="square"/>
           <a:lstStyle/>
           <a:p>
-            <a:pPr algn="l"/>
-            <a:r>
-              <a:rPr sz="1200" b="1">
-                <a:solidFill>
-                  <a:srgbClr val="1565C0"/>
-                </a:solidFill>
-                <a:latin typeface="メイリオ"/>
-                <a:ea typeface="メイリオ"/>
-                <a:cs typeface="メイリオ"/>
-              </a:rPr>
-              <a:t>②  </a:t>
-            </a:r>
-            <a:r>
-              <a:rPr sz="1200" b="1">
-                <a:solidFill>
-                  <a:srgbClr val="1565C0"/>
-                </a:solidFill>
-                <a:latin typeface="メイリオ"/>
-                <a:ea typeface="メイリオ"/>
-                <a:cs typeface="メイリオ"/>
-              </a:rPr>
-              <a:t>弊社の対応方針</a:t>
-            </a:r>
+            <a:pPr algn="ctr"/>
           </a:p>
         </p:txBody>
       </p:sp>
@@ -3408,8 +3335,8 @@
         </p:nvSpPr>
         <p:spPr>
           <a:xfrm>
-            <a:off x="457200" y="2779776"/>
-            <a:ext cx="4357116" cy="1188720"/>
+            <a:off x="3544824" y="1783080"/>
+            <a:ext cx="2813304" cy="2743200"/>
           </a:xfrm>
           <a:prstGeom prst="rect">
             <a:avLst/>
@@ -3454,8 +3381,8 @@
         </p:nvSpPr>
         <p:spPr>
           <a:xfrm>
-            <a:off x="658368" y="2944368"/>
-            <a:ext cx="384048" cy="384048"/>
+            <a:off x="3672840" y="1947672"/>
+            <a:ext cx="2557272" cy="457200"/>
           </a:xfrm>
           <a:prstGeom prst="rect">
             <a:avLst/>
@@ -3488,7 +3415,7 @@
           <a:p>
             <a:pPr algn="ctr"/>
             <a:r>
-              <a:rPr sz="1200" b="1">
+              <a:rPr sz="1400" b="1">
                 <a:solidFill>
                   <a:srgbClr val="FFFFFF"/>
                 </a:solidFill>
@@ -3496,7 +3423,7 @@
                 <a:ea typeface="メイリオ"/>
                 <a:cs typeface="メイリオ"/>
               </a:rPr>
-              <a:t>01</a:t>
+              <a:t>ご提案</a:t>
             </a:r>
           </a:p>
         </p:txBody>
@@ -3509,265 +3436,8 @@
         </p:nvSpPr>
         <p:spPr>
           <a:xfrm>
-            <a:off x="1152144" y="2926080"/>
-            <a:ext cx="3461003" cy="420624"/>
-          </a:xfrm>
-          <a:prstGeom prst="rect">
-            <a:avLst/>
-          </a:prstGeom>
-          <a:noFill/>
-        </p:spPr>
-        <p:txBody>
-          <a:bodyPr wrap="square" lIns="0" rIns="54864" tIns="27432" bIns="27432" anchor="ctr">
-            <a:spAutoFit/>
-          </a:bodyPr>
-          <a:lstStyle/>
-          <a:p>
-            <a:pPr algn="l"/>
-            <a:r>
-              <a:rPr sz="1400" b="1">
-                <a:solidFill>
-                  <a:srgbClr val="1F285A"/>
-                </a:solidFill>
-                <a:latin typeface="メイリオ"/>
-                <a:ea typeface="メイリオ"/>
-                <a:cs typeface="メイリオ"/>
-              </a:rPr>
-              <a:t>配信の最適化</a:t>
-            </a:r>
-          </a:p>
-        </p:txBody>
-      </p:sp>
-      <p:sp>
-        <p:nvSpPr>
-          <p:cNvPr id="16" name="TextBox 15"/>
-          <p:cNvSpPr txBox="1"/>
-          <p:nvPr/>
-        </p:nvSpPr>
-        <p:spPr>
-          <a:xfrm>
-            <a:off x="1152144" y="3383280"/>
-            <a:ext cx="3461003" cy="475488"/>
-          </a:xfrm>
-          <a:prstGeom prst="rect">
-            <a:avLst/>
-          </a:prstGeom>
-          <a:noFill/>
-        </p:spPr>
-        <p:txBody>
-          <a:bodyPr wrap="square" lIns="0" rIns="54864" tIns="27432" bIns="27432" anchor="t">
-            <a:spAutoFit/>
-          </a:bodyPr>
-          <a:lstStyle/>
-          <a:p>
-            <a:pPr algn="l">
-              <a:lnSpc>
-                <a:spcPct val="125000"/>
-              </a:lnSpc>
-            </a:pPr>
-            <a:r>
-              <a:rPr sz="1100">
-                <a:solidFill>
-                  <a:srgbClr val="333333"/>
-                </a:solidFill>
-                <a:latin typeface="メイリオ"/>
-                <a:ea typeface="メイリオ"/>
-                <a:cs typeface="メイリオ"/>
-              </a:rPr>
-              <a:t>一斉配信から「セグメント配信」へ移行し、不要コストを圧縮します。</a:t>
-            </a:r>
-          </a:p>
-        </p:txBody>
-      </p:sp>
-      <p:sp>
-        <p:nvSpPr>
-          <p:cNvPr id="17" name="Rectangle 16"/>
-          <p:cNvSpPr/>
-          <p:nvPr/>
-        </p:nvSpPr>
-        <p:spPr>
-          <a:xfrm>
-            <a:off x="5088636" y="2779776"/>
-            <a:ext cx="4357116" cy="1188720"/>
-          </a:xfrm>
-          <a:prstGeom prst="rect">
-            <a:avLst/>
-          </a:prstGeom>
-          <a:solidFill>
-            <a:srgbClr val="F4F7FF"/>
-          </a:solidFill>
-          <a:ln w="12700">
-            <a:solidFill>
-              <a:srgbClr val="1565C0"/>
-            </a:solidFill>
-          </a:ln>
-          <a:effectLst/>
-        </p:spPr>
-        <p:style>
-          <a:lnRef idx="1">
-            <a:schemeClr val="accent1"/>
-          </a:lnRef>
-          <a:fillRef idx="3">
-            <a:schemeClr val="accent1"/>
-          </a:fillRef>
-          <a:effectRef idx="2">
-            <a:schemeClr val="accent1"/>
-          </a:effectRef>
-          <a:fontRef idx="minor">
-            <a:schemeClr val="lt1"/>
-          </a:fontRef>
-        </p:style>
-        <p:txBody>
-          <a:bodyPr rtlCol="0" anchor="ctr" wrap="square"/>
-          <a:lstStyle/>
-          <a:p>
-            <a:pPr algn="ctr"/>
-          </a:p>
-        </p:txBody>
-      </p:sp>
-      <p:sp>
-        <p:nvSpPr>
-          <p:cNvPr id="18" name="Rectangle 17"/>
-          <p:cNvSpPr/>
-          <p:nvPr/>
-        </p:nvSpPr>
-        <p:spPr>
-          <a:xfrm>
-            <a:off x="5289803" y="2944368"/>
-            <a:ext cx="384048" cy="384048"/>
-          </a:xfrm>
-          <a:prstGeom prst="rect">
-            <a:avLst/>
-          </a:prstGeom>
-          <a:solidFill>
-            <a:srgbClr val="1565C0"/>
-          </a:solidFill>
-          <a:ln>
-            <a:noFill/>
-          </a:ln>
-          <a:effectLst/>
-        </p:spPr>
-        <p:style>
-          <a:lnRef idx="1">
-            <a:schemeClr val="accent1"/>
-          </a:lnRef>
-          <a:fillRef idx="3">
-            <a:schemeClr val="accent1"/>
-          </a:fillRef>
-          <a:effectRef idx="2">
-            <a:schemeClr val="accent1"/>
-          </a:effectRef>
-          <a:fontRef idx="minor">
-            <a:schemeClr val="lt1"/>
-          </a:fontRef>
-        </p:style>
-        <p:txBody>
-          <a:bodyPr rtlCol="0" anchor="ctr" wrap="square" lIns="0" rIns="0" tIns="0" bIns="0"/>
-          <a:lstStyle/>
-          <a:p>
-            <a:pPr algn="ctr"/>
-            <a:r>
-              <a:rPr sz="1200" b="1">
-                <a:solidFill>
-                  <a:srgbClr val="FFFFFF"/>
-                </a:solidFill>
-                <a:latin typeface="メイリオ"/>
-                <a:ea typeface="メイリオ"/>
-                <a:cs typeface="メイリオ"/>
-              </a:rPr>
-              <a:t>02</a:t>
-            </a:r>
-          </a:p>
-        </p:txBody>
-      </p:sp>
-      <p:sp>
-        <p:nvSpPr>
-          <p:cNvPr id="19" name="TextBox 18"/>
-          <p:cNvSpPr txBox="1"/>
-          <p:nvPr/>
-        </p:nvSpPr>
-        <p:spPr>
-          <a:xfrm>
-            <a:off x="5783579" y="2926080"/>
-            <a:ext cx="3461003" cy="420624"/>
-          </a:xfrm>
-          <a:prstGeom prst="rect">
-            <a:avLst/>
-          </a:prstGeom>
-          <a:noFill/>
-        </p:spPr>
-        <p:txBody>
-          <a:bodyPr wrap="square" lIns="0" rIns="54864" tIns="27432" bIns="27432" anchor="ctr">
-            <a:spAutoFit/>
-          </a:bodyPr>
-          <a:lstStyle/>
-          <a:p>
-            <a:pPr algn="l"/>
-            <a:r>
-              <a:rPr sz="1400" b="1">
-                <a:solidFill>
-                  <a:srgbClr val="1F285A"/>
-                </a:solidFill>
-                <a:latin typeface="メイリオ"/>
-                <a:ea typeface="メイリオ"/>
-                <a:cs typeface="メイリオ"/>
-              </a:rPr>
-              <a:t>特別プランの再設計</a:t>
-            </a:r>
-          </a:p>
-        </p:txBody>
-      </p:sp>
-      <p:sp>
-        <p:nvSpPr>
-          <p:cNvPr id="20" name="TextBox 19"/>
-          <p:cNvSpPr txBox="1"/>
-          <p:nvPr/>
-        </p:nvSpPr>
-        <p:spPr>
-          <a:xfrm>
-            <a:off x="5783579" y="3383280"/>
-            <a:ext cx="3461003" cy="475488"/>
-          </a:xfrm>
-          <a:prstGeom prst="rect">
-            <a:avLst/>
-          </a:prstGeom>
-          <a:noFill/>
-        </p:spPr>
-        <p:txBody>
-          <a:bodyPr wrap="square" lIns="0" rIns="54864" tIns="27432" bIns="27432" anchor="t">
-            <a:spAutoFit/>
-          </a:bodyPr>
-          <a:lstStyle/>
-          <a:p>
-            <a:pPr algn="l">
-              <a:lnSpc>
-                <a:spcPct val="125000"/>
-              </a:lnSpc>
-            </a:pPr>
-            <a:r>
-              <a:rPr sz="1100">
-                <a:solidFill>
-                  <a:srgbClr val="333333"/>
-                </a:solidFill>
-                <a:latin typeface="メイリオ"/>
-                <a:ea typeface="メイリオ"/>
-                <a:cs typeface="メイリオ"/>
-              </a:rPr>
-              <a:t>新料金下でも費用対効果を最大化できるよう、弊社独自の「調整プラン（特別還元）」をご提供します。</a:t>
-            </a:r>
-          </a:p>
-        </p:txBody>
-      </p:sp>
-      <p:sp>
-        <p:nvSpPr>
-          <p:cNvPr id="21" name="TextBox 20"/>
-          <p:cNvSpPr txBox="1"/>
-          <p:nvPr/>
-        </p:nvSpPr>
-        <p:spPr>
-          <a:xfrm>
-            <a:off x="457200" y="4096512"/>
-            <a:ext cx="5486400" cy="237744"/>
+            <a:off x="3672840" y="2569464"/>
+            <a:ext cx="2557272" cy="566928"/>
           </a:xfrm>
           <a:prstGeom prst="rect">
             <a:avLst/>
@@ -3780,180 +3450,31 @@
           </a:bodyPr>
           <a:lstStyle/>
           <a:p>
-            <a:pPr algn="l"/>
-            <a:r>
-              <a:rPr sz="1200" b="1">
-                <a:solidFill>
-                  <a:srgbClr val="1F285A"/>
+            <a:pPr algn="ctr"/>
+            <a:r>
+              <a:rPr sz="1700" b="1">
+                <a:solidFill>
+                  <a:srgbClr val="333333"/>
                 </a:solidFill>
                 <a:latin typeface="メイリオ"/>
                 <a:ea typeface="メイリオ"/>
                 <a:cs typeface="メイリオ"/>
               </a:rPr>
-              <a:t>③  </a:t>
-            </a:r>
-            <a:r>
-              <a:rPr sz="1200" b="1">
-                <a:solidFill>
-                  <a:srgbClr val="1F285A"/>
-                </a:solidFill>
-                <a:latin typeface="メイリオ"/>
-                <a:ea typeface="メイリオ"/>
-                <a:cs typeface="メイリオ"/>
-              </a:rPr>
-              <a:t>スケジュール（なぜ11月からの適用なのか）</a:t>
+              <a:t>配信を見直します</a:t>
             </a:r>
           </a:p>
         </p:txBody>
       </p:sp>
       <p:sp>
         <p:nvSpPr>
-          <p:cNvPr id="22" name="Rectangle 21"/>
-          <p:cNvSpPr/>
-          <p:nvPr/>
-        </p:nvSpPr>
-        <p:spPr>
-          <a:xfrm>
-            <a:off x="457200" y="4315968"/>
-            <a:ext cx="2813304" cy="1901952"/>
-          </a:xfrm>
-          <a:prstGeom prst="rect">
-            <a:avLst/>
-          </a:prstGeom>
-          <a:solidFill>
-            <a:srgbClr val="F2F2F2"/>
-          </a:solidFill>
-          <a:ln w="12700">
-            <a:solidFill>
-              <a:srgbClr val="D9D9D9"/>
-            </a:solidFill>
-          </a:ln>
-          <a:effectLst/>
-        </p:spPr>
-        <p:style>
-          <a:lnRef idx="1">
-            <a:schemeClr val="accent1"/>
-          </a:lnRef>
-          <a:fillRef idx="3">
-            <a:schemeClr val="accent1"/>
-          </a:fillRef>
-          <a:effectRef idx="2">
-            <a:schemeClr val="accent1"/>
-          </a:effectRef>
-          <a:fontRef idx="minor">
-            <a:schemeClr val="lt1"/>
-          </a:fontRef>
-        </p:style>
-        <p:txBody>
-          <a:bodyPr rtlCol="0" anchor="ctr" wrap="square"/>
-          <a:lstStyle/>
-          <a:p>
-            <a:pPr algn="ctr"/>
-          </a:p>
-        </p:txBody>
-      </p:sp>
-      <p:sp>
-        <p:nvSpPr>
-          <p:cNvPr id="23" name="Rectangle 22"/>
-          <p:cNvSpPr/>
-          <p:nvPr/>
-        </p:nvSpPr>
-        <p:spPr>
-          <a:xfrm>
-            <a:off x="548640" y="4443983"/>
-            <a:ext cx="2630424" cy="384048"/>
-          </a:xfrm>
-          <a:prstGeom prst="rect">
-            <a:avLst/>
-          </a:prstGeom>
-          <a:solidFill>
-            <a:srgbClr val="8C8C8C"/>
-          </a:solidFill>
-          <a:ln>
-            <a:noFill/>
-          </a:ln>
-          <a:effectLst/>
-        </p:spPr>
-        <p:style>
-          <a:lnRef idx="1">
-            <a:schemeClr val="accent1"/>
-          </a:lnRef>
-          <a:fillRef idx="3">
-            <a:schemeClr val="accent1"/>
-          </a:fillRef>
-          <a:effectRef idx="2">
-            <a:schemeClr val="accent1"/>
-          </a:effectRef>
-          <a:fontRef idx="minor">
-            <a:schemeClr val="lt1"/>
-          </a:fontRef>
-        </p:style>
-        <p:txBody>
-          <a:bodyPr rtlCol="0" anchor="ctr" wrap="square" lIns="0" rIns="0" tIns="0" bIns="0"/>
-          <a:lstStyle/>
-          <a:p>
-            <a:pPr algn="ctr"/>
-            <a:r>
-              <a:rPr sz="1300" b="1">
-                <a:solidFill>
-                  <a:srgbClr val="FFFFFF"/>
-                </a:solidFill>
-                <a:latin typeface="メイリオ"/>
-                <a:ea typeface="メイリオ"/>
-                <a:cs typeface="メイリオ"/>
-              </a:rPr>
-              <a:t>10月</a:t>
-            </a:r>
-          </a:p>
-        </p:txBody>
-      </p:sp>
-      <p:sp>
-        <p:nvSpPr>
-          <p:cNvPr id="24" name="TextBox 23"/>
+          <p:cNvPr id="16" name="TextBox 15"/>
           <p:cNvSpPr txBox="1"/>
           <p:nvPr/>
         </p:nvSpPr>
         <p:spPr>
           <a:xfrm>
-            <a:off x="566928" y="4882896"/>
-            <a:ext cx="2593848" cy="310896"/>
-          </a:xfrm>
-          <a:prstGeom prst="rect">
-            <a:avLst/>
-          </a:prstGeom>
-          <a:noFill/>
-        </p:spPr>
-        <p:txBody>
-          <a:bodyPr wrap="square" lIns="0" rIns="0" tIns="27432" bIns="27432" anchor="ctr">
-            <a:spAutoFit/>
-          </a:bodyPr>
-          <a:lstStyle/>
-          <a:p>
-            <a:pPr algn="ctr"/>
-            <a:r>
-              <a:rPr sz="1300" b="1">
-                <a:solidFill>
-                  <a:srgbClr val="333333"/>
-                </a:solidFill>
-                <a:latin typeface="メイリオ"/>
-                <a:ea typeface="メイリオ"/>
-                <a:cs typeface="メイリオ"/>
-              </a:rPr>
-              <a:t>配信データ計測・検証期</a:t>
-            </a:r>
-          </a:p>
-        </p:txBody>
-      </p:sp>
-      <p:sp>
-        <p:nvSpPr>
-          <p:cNvPr id="25" name="TextBox 24"/>
-          <p:cNvSpPr txBox="1"/>
-          <p:nvPr/>
-        </p:nvSpPr>
-        <p:spPr>
-          <a:xfrm>
-            <a:off x="585216" y="5230368"/>
-            <a:ext cx="2557272" cy="603504"/>
+            <a:off x="3709416" y="3264408"/>
+            <a:ext cx="2484120" cy="1005840"/>
           </a:xfrm>
           <a:prstGeom prst="rect">
             <a:avLst/>
@@ -3968,11 +3489,11 @@
           <a:p>
             <a:pPr algn="l">
               <a:lnSpc>
-                <a:spcPct val="128000"/>
+                <a:spcPct val="135000"/>
               </a:lnSpc>
             </a:pPr>
             <a:r>
-              <a:rPr sz="1050">
+              <a:rPr sz="1200">
                 <a:solidFill>
                   <a:srgbClr val="333333"/>
                 </a:solidFill>
@@ -3980,58 +3501,21 @@
                 <a:ea typeface="メイリオ"/>
                 <a:cs typeface="メイリオ"/>
               </a:rPr>
-              <a:t>新料金下での実際の配信ボリュームとコストの適正推移を測定・分析します。</a:t>
+              <a:t>一斉配信からセグメント配信へ移行し、ムダな配信コストを削減します。</a:t>
             </a:r>
           </a:p>
         </p:txBody>
       </p:sp>
       <p:sp>
         <p:nvSpPr>
-          <p:cNvPr id="26" name="TextBox 25"/>
-          <p:cNvSpPr txBox="1"/>
-          <p:nvPr/>
-        </p:nvSpPr>
-        <p:spPr>
-          <a:xfrm>
-            <a:off x="585216" y="5870448"/>
-            <a:ext cx="2557272" cy="256032"/>
-          </a:xfrm>
-          <a:prstGeom prst="rect">
-            <a:avLst/>
-          </a:prstGeom>
-          <a:noFill/>
-        </p:spPr>
-        <p:txBody>
-          <a:bodyPr wrap="square" lIns="0" rIns="0" tIns="27432" bIns="27432" anchor="ctr">
-            <a:spAutoFit/>
-          </a:bodyPr>
-          <a:lstStyle/>
-          <a:p>
-            <a:pPr algn="l"/>
-            <a:r>
-              <a:rPr sz="950">
-                <a:solidFill>
-                  <a:srgbClr val="808080"/>
-                </a:solidFill>
-                <a:latin typeface="メイリオ"/>
-                <a:ea typeface="メイリオ"/>
-                <a:cs typeface="メイリオ"/>
-              </a:rPr>
-              <a:t>※ 原則、通常プラン適用</a:t>
-            </a:r>
-          </a:p>
-        </p:txBody>
-      </p:sp>
-      <p:sp>
-        <p:nvSpPr>
-          <p:cNvPr id="27" name="Right Arrow 26"/>
+          <p:cNvPr id="17" name="Right Arrow 16"/>
           <p:cNvSpPr/>
           <p:nvPr/>
         </p:nvSpPr>
         <p:spPr>
           <a:xfrm>
-            <a:off x="3307080" y="5129783"/>
-            <a:ext cx="201168" cy="274320"/>
+            <a:off x="6394704" y="3008376"/>
+            <a:ext cx="201168" cy="292608"/>
           </a:xfrm>
           <a:prstGeom prst="rightArrow">
             <a:avLst/>
@@ -4068,237 +3552,14 @@
       </p:sp>
       <p:sp>
         <p:nvSpPr>
-          <p:cNvPr id="28" name="Rectangle 27"/>
+          <p:cNvPr id="18" name="Rectangle 17"/>
           <p:cNvSpPr/>
           <p:nvPr/>
         </p:nvSpPr>
         <p:spPr>
           <a:xfrm>
-            <a:off x="3544824" y="4315968"/>
-            <a:ext cx="2813304" cy="1901952"/>
-          </a:xfrm>
-          <a:prstGeom prst="rect">
-            <a:avLst/>
-          </a:prstGeom>
-          <a:solidFill>
-            <a:srgbClr val="F4F7FF"/>
-          </a:solidFill>
-          <a:ln w="12700">
-            <a:solidFill>
-              <a:srgbClr val="1565C0"/>
-            </a:solidFill>
-          </a:ln>
-          <a:effectLst/>
-        </p:spPr>
-        <p:style>
-          <a:lnRef idx="1">
-            <a:schemeClr val="accent1"/>
-          </a:lnRef>
-          <a:fillRef idx="3">
-            <a:schemeClr val="accent1"/>
-          </a:fillRef>
-          <a:effectRef idx="2">
-            <a:schemeClr val="accent1"/>
-          </a:effectRef>
-          <a:fontRef idx="minor">
-            <a:schemeClr val="lt1"/>
-          </a:fontRef>
-        </p:style>
-        <p:txBody>
-          <a:bodyPr rtlCol="0" anchor="ctr" wrap="square"/>
-          <a:lstStyle/>
-          <a:p>
-            <a:pPr algn="ctr"/>
-          </a:p>
-        </p:txBody>
-      </p:sp>
-      <p:sp>
-        <p:nvSpPr>
-          <p:cNvPr id="29" name="Rectangle 28"/>
-          <p:cNvSpPr/>
-          <p:nvPr/>
-        </p:nvSpPr>
-        <p:spPr>
-          <a:xfrm>
-            <a:off x="3636264" y="4443983"/>
-            <a:ext cx="2630424" cy="384048"/>
-          </a:xfrm>
-          <a:prstGeom prst="rect">
-            <a:avLst/>
-          </a:prstGeom>
-          <a:solidFill>
-            <a:srgbClr val="1565C0"/>
-          </a:solidFill>
-          <a:ln>
-            <a:noFill/>
-          </a:ln>
-          <a:effectLst/>
-        </p:spPr>
-        <p:style>
-          <a:lnRef idx="1">
-            <a:schemeClr val="accent1"/>
-          </a:lnRef>
-          <a:fillRef idx="3">
-            <a:schemeClr val="accent1"/>
-          </a:fillRef>
-          <a:effectRef idx="2">
-            <a:schemeClr val="accent1"/>
-          </a:effectRef>
-          <a:fontRef idx="minor">
-            <a:schemeClr val="lt1"/>
-          </a:fontRef>
-        </p:style>
-        <p:txBody>
-          <a:bodyPr rtlCol="0" anchor="ctr" wrap="square" lIns="0" rIns="0" tIns="0" bIns="0"/>
-          <a:lstStyle/>
-          <a:p>
-            <a:pPr algn="ctr"/>
-            <a:r>
-              <a:rPr sz="1300" b="1">
-                <a:solidFill>
-                  <a:srgbClr val="FFFFFF"/>
-                </a:solidFill>
-                <a:latin typeface="メイリオ"/>
-                <a:ea typeface="メイリオ"/>
-                <a:cs typeface="メイリオ"/>
-              </a:rPr>
-              <a:t>10月下旬</a:t>
-            </a:r>
-          </a:p>
-        </p:txBody>
-      </p:sp>
-      <p:sp>
-        <p:nvSpPr>
-          <p:cNvPr id="30" name="TextBox 29"/>
-          <p:cNvSpPr txBox="1"/>
-          <p:nvPr/>
-        </p:nvSpPr>
-        <p:spPr>
-          <a:xfrm>
-            <a:off x="3654552" y="4882896"/>
-            <a:ext cx="2593848" cy="310896"/>
-          </a:xfrm>
-          <a:prstGeom prst="rect">
-            <a:avLst/>
-          </a:prstGeom>
-          <a:noFill/>
-        </p:spPr>
-        <p:txBody>
-          <a:bodyPr wrap="square" lIns="0" rIns="0" tIns="27432" bIns="27432" anchor="ctr">
-            <a:spAutoFit/>
-          </a:bodyPr>
-          <a:lstStyle/>
-          <a:p>
-            <a:pPr algn="ctr"/>
-            <a:r>
-              <a:rPr sz="1300" b="1">
-                <a:solidFill>
-                  <a:srgbClr val="333333"/>
-                </a:solidFill>
-                <a:latin typeface="メイリオ"/>
-                <a:ea typeface="メイリオ"/>
-                <a:cs typeface="メイリオ"/>
-              </a:rPr>
-              <a:t>個別シミュレーション提示</a:t>
-            </a:r>
-          </a:p>
-        </p:txBody>
-      </p:sp>
-      <p:sp>
-        <p:nvSpPr>
-          <p:cNvPr id="31" name="TextBox 30"/>
-          <p:cNvSpPr txBox="1"/>
-          <p:nvPr/>
-        </p:nvSpPr>
-        <p:spPr>
-          <a:xfrm>
-            <a:off x="3672840" y="5230368"/>
-            <a:ext cx="2557272" cy="603504"/>
-          </a:xfrm>
-          <a:prstGeom prst="rect">
-            <a:avLst/>
-          </a:prstGeom>
-          <a:noFill/>
-        </p:spPr>
-        <p:txBody>
-          <a:bodyPr wrap="square" lIns="0" rIns="0" tIns="27432" bIns="27432" anchor="t">
-            <a:spAutoFit/>
-          </a:bodyPr>
-          <a:lstStyle/>
-          <a:p>
-            <a:pPr algn="l">
-              <a:lnSpc>
-                <a:spcPct val="128000"/>
-              </a:lnSpc>
-            </a:pPr>
-            <a:r>
-              <a:rPr sz="1050">
-                <a:solidFill>
-                  <a:srgbClr val="333333"/>
-                </a:solidFill>
-                <a:latin typeface="メイリオ"/>
-                <a:ea typeface="メイリオ"/>
-                <a:cs typeface="メイリオ"/>
-              </a:rPr>
-              <a:t>10月の配信実績および媒体インセンティブを試算し、貴社に最もメリットが出る特別プランを個別に作成します。</a:t>
-            </a:r>
-          </a:p>
-        </p:txBody>
-      </p:sp>
-      <p:sp>
-        <p:nvSpPr>
-          <p:cNvPr id="32" name="Right Arrow 31"/>
-          <p:cNvSpPr/>
-          <p:nvPr/>
-        </p:nvSpPr>
-        <p:spPr>
-          <a:xfrm>
-            <a:off x="6394704" y="5129783"/>
-            <a:ext cx="201168" cy="274320"/>
-          </a:xfrm>
-          <a:prstGeom prst="rightArrow">
-            <a:avLst/>
-          </a:prstGeom>
-          <a:solidFill>
-            <a:srgbClr val="D9D9D9"/>
-          </a:solidFill>
-          <a:ln>
-            <a:noFill/>
-          </a:ln>
-          <a:effectLst/>
-        </p:spPr>
-        <p:style>
-          <a:lnRef idx="1">
-            <a:schemeClr val="accent1"/>
-          </a:lnRef>
-          <a:fillRef idx="3">
-            <a:schemeClr val="accent1"/>
-          </a:fillRef>
-          <a:effectRef idx="2">
-            <a:schemeClr val="accent1"/>
-          </a:effectRef>
-          <a:fontRef idx="minor">
-            <a:schemeClr val="lt1"/>
-          </a:fontRef>
-        </p:style>
-        <p:txBody>
-          <a:bodyPr rtlCol="0" anchor="ctr" wrap="square"/>
-          <a:lstStyle/>
-          <a:p>
-            <a:pPr algn="ctr"/>
-          </a:p>
-        </p:txBody>
-      </p:sp>
-      <p:sp>
-        <p:nvSpPr>
-          <p:cNvPr id="33" name="Rectangle 32"/>
-          <p:cNvSpPr/>
-          <p:nvPr/>
-        </p:nvSpPr>
-        <p:spPr>
-          <a:xfrm>
-            <a:off x="6632448" y="4315968"/>
-            <a:ext cx="2813304" cy="1901952"/>
+            <a:off x="6632448" y="1783080"/>
+            <a:ext cx="2813304" cy="2743200"/>
           </a:xfrm>
           <a:prstGeom prst="rect">
             <a:avLst/>
@@ -4337,14 +3598,14 @@
       </p:sp>
       <p:sp>
         <p:nvSpPr>
-          <p:cNvPr id="34" name="Rectangle 33"/>
+          <p:cNvPr id="19" name="Rectangle 18"/>
           <p:cNvSpPr/>
           <p:nvPr/>
         </p:nvSpPr>
         <p:spPr>
           <a:xfrm>
-            <a:off x="6723887" y="4443983"/>
-            <a:ext cx="2630424" cy="384048"/>
+            <a:off x="6760463" y="1947672"/>
+            <a:ext cx="2557272" cy="457200"/>
           </a:xfrm>
           <a:prstGeom prst="rect">
             <a:avLst/>
@@ -4377,7 +3638,7 @@
           <a:p>
             <a:pPr algn="ctr"/>
             <a:r>
-              <a:rPr sz="1300" b="1">
+              <a:rPr sz="1400" b="1">
                 <a:solidFill>
                   <a:srgbClr val="1F285A"/>
                 </a:solidFill>
@@ -4392,14 +3653,14 @@
       </p:sp>
       <p:sp>
         <p:nvSpPr>
-          <p:cNvPr id="35" name="TextBox 34"/>
+          <p:cNvPr id="20" name="TextBox 19"/>
           <p:cNvSpPr txBox="1"/>
           <p:nvPr/>
         </p:nvSpPr>
         <p:spPr>
           <a:xfrm>
-            <a:off x="6742176" y="4882896"/>
-            <a:ext cx="2593848" cy="310896"/>
+            <a:off x="6760463" y="2569464"/>
+            <a:ext cx="2557272" cy="566928"/>
           </a:xfrm>
           <a:prstGeom prst="rect">
             <a:avLst/>
@@ -4414,7 +3675,7 @@
           <a:p>
             <a:pPr algn="ctr"/>
             <a:r>
-              <a:rPr sz="1300" b="1">
+              <a:rPr sz="1700" b="1">
                 <a:solidFill>
                   <a:srgbClr val="FFFFFF"/>
                 </a:solidFill>
@@ -4422,21 +3683,21 @@
                 <a:ea typeface="メイリオ"/>
                 <a:cs typeface="メイリオ"/>
               </a:rPr>
-              <a:t>特別プラン適用開始</a:t>
+              <a:t>特別プランを適用</a:t>
             </a:r>
           </a:p>
         </p:txBody>
       </p:sp>
       <p:sp>
         <p:nvSpPr>
-          <p:cNvPr id="36" name="TextBox 35"/>
+          <p:cNvPr id="21" name="TextBox 20"/>
           <p:cNvSpPr txBox="1"/>
           <p:nvPr/>
         </p:nvSpPr>
         <p:spPr>
           <a:xfrm>
-            <a:off x="6760463" y="5230368"/>
-            <a:ext cx="2557272" cy="603504"/>
+            <a:off x="6797039" y="3264408"/>
+            <a:ext cx="2484120" cy="1005840"/>
           </a:xfrm>
           <a:prstGeom prst="rect">
             <a:avLst/>
@@ -4451,11 +3712,11 @@
           <a:p>
             <a:pPr algn="l">
               <a:lnSpc>
-                <a:spcPct val="128000"/>
+                <a:spcPct val="135000"/>
               </a:lnSpc>
             </a:pPr>
             <a:r>
-              <a:rPr sz="1050">
+              <a:rPr sz="1200">
                 <a:solidFill>
                   <a:srgbClr val="FFFFFF"/>
                 </a:solidFill>
@@ -4463,7 +3724,105 @@
                 <a:ea typeface="メイリオ"/>
                 <a:cs typeface="メイリオ"/>
               </a:rPr>
-              <a:t>各社様に最適化した特別プランを正式に適用します。</a:t>
+              <a:t>10月の実績をもとに、貴社に合わせた特別プランを適用します。</a:t>
+            </a:r>
+          </a:p>
+        </p:txBody>
+      </p:sp>
+      <p:sp>
+        <p:nvSpPr>
+          <p:cNvPr id="22" name="Rectangle 21"/>
+          <p:cNvSpPr/>
+          <p:nvPr/>
+        </p:nvSpPr>
+        <p:spPr>
+          <a:xfrm>
+            <a:off x="457200" y="4846320"/>
+            <a:ext cx="8988552" cy="960120"/>
+          </a:xfrm>
+          <a:prstGeom prst="rect">
+            <a:avLst/>
+          </a:prstGeom>
+          <a:solidFill>
+            <a:srgbClr val="FFFFFF"/>
+          </a:solidFill>
+          <a:ln w="12700">
+            <a:solidFill>
+              <a:srgbClr val="1F285A"/>
+            </a:solidFill>
+          </a:ln>
+          <a:effectLst/>
+        </p:spPr>
+        <p:style>
+          <a:lnRef idx="1">
+            <a:schemeClr val="accent1"/>
+          </a:lnRef>
+          <a:fillRef idx="3">
+            <a:schemeClr val="accent1"/>
+          </a:fillRef>
+          <a:effectRef idx="2">
+            <a:schemeClr val="accent1"/>
+          </a:effectRef>
+          <a:fontRef idx="minor">
+            <a:schemeClr val="lt1"/>
+          </a:fontRef>
+        </p:style>
+        <p:txBody>
+          <a:bodyPr rtlCol="0" anchor="ctr" wrap="square"/>
+          <a:lstStyle/>
+          <a:p>
+            <a:pPr algn="ctr"/>
+          </a:p>
+        </p:txBody>
+      </p:sp>
+      <p:sp>
+        <p:nvSpPr>
+          <p:cNvPr id="23" name="TextBox 22"/>
+          <p:cNvSpPr txBox="1"/>
+          <p:nvPr/>
+        </p:nvSpPr>
+        <p:spPr>
+          <a:xfrm>
+            <a:off x="731520" y="4846320"/>
+            <a:ext cx="8439912" cy="960120"/>
+          </a:xfrm>
+          <a:prstGeom prst="rect">
+            <a:avLst/>
+          </a:prstGeom>
+          <a:noFill/>
+        </p:spPr>
+        <p:txBody>
+          <a:bodyPr wrap="square" lIns="0" rIns="0" tIns="27432" bIns="27432" anchor="ctr">
+            <a:spAutoFit/>
+          </a:bodyPr>
+          <a:lstStyle/>
+          <a:p>
+            <a:pPr algn="l">
+              <a:lnSpc>
+                <a:spcPct val="135000"/>
+              </a:lnSpc>
+            </a:pPr>
+            <a:r>
+              <a:rPr sz="1200" b="1">
+                <a:solidFill>
+                  <a:srgbClr val="1F285A"/>
+                </a:solidFill>
+                <a:latin typeface="メイリオ"/>
+                <a:ea typeface="メイリオ"/>
+                <a:cs typeface="メイリオ"/>
+              </a:rPr>
+              <a:t>※ </a:t>
+            </a:r>
+            <a:r>
+              <a:rPr sz="1200">
+                <a:solidFill>
+                  <a:srgbClr val="333333"/>
+                </a:solidFill>
+                <a:latin typeface="メイリオ"/>
+                <a:ea typeface="メイリオ"/>
+                <a:cs typeface="メイリオ"/>
+              </a:rPr>
+              <a:t>10月は、新料金での配信実績を計測する期間です（原則、通常プランの適用となります）。その実績と媒体インセンティブを踏まえて、11月から貴社専用の特別プランを適用いたします。</a:t>
             </a:r>
           </a:p>
         </p:txBody>
